--- a/Project/ppt.pptx
+++ b/Project/ppt.pptx
@@ -6,33 +6,34 @@
   </p:sldMasterIdLst>
   <p:sldIdLst>
     <p:sldId id="256" r:id="rId2"/>
-    <p:sldId id="279" r:id="rId3"/>
-    <p:sldId id="280" r:id="rId4"/>
-    <p:sldId id="281" r:id="rId5"/>
-    <p:sldId id="282" r:id="rId6"/>
-    <p:sldId id="283" r:id="rId7"/>
-    <p:sldId id="284" r:id="rId8"/>
-    <p:sldId id="257" r:id="rId9"/>
-    <p:sldId id="259" r:id="rId10"/>
-    <p:sldId id="260" r:id="rId11"/>
-    <p:sldId id="261" r:id="rId12"/>
-    <p:sldId id="266" r:id="rId13"/>
-    <p:sldId id="277" r:id="rId14"/>
-    <p:sldId id="276" r:id="rId15"/>
-    <p:sldId id="275" r:id="rId16"/>
-    <p:sldId id="274" r:id="rId17"/>
-    <p:sldId id="273" r:id="rId18"/>
-    <p:sldId id="272" r:id="rId19"/>
-    <p:sldId id="271" r:id="rId20"/>
-    <p:sldId id="270" r:id="rId21"/>
-    <p:sldId id="269" r:id="rId22"/>
-    <p:sldId id="267" r:id="rId23"/>
-    <p:sldId id="278" r:id="rId24"/>
-    <p:sldId id="268" r:id="rId25"/>
-    <p:sldId id="265" r:id="rId26"/>
-    <p:sldId id="264" r:id="rId27"/>
-    <p:sldId id="263" r:id="rId28"/>
-    <p:sldId id="262" r:id="rId29"/>
+    <p:sldId id="285" r:id="rId3"/>
+    <p:sldId id="279" r:id="rId4"/>
+    <p:sldId id="280" r:id="rId5"/>
+    <p:sldId id="281" r:id="rId6"/>
+    <p:sldId id="282" r:id="rId7"/>
+    <p:sldId id="283" r:id="rId8"/>
+    <p:sldId id="284" r:id="rId9"/>
+    <p:sldId id="257" r:id="rId10"/>
+    <p:sldId id="259" r:id="rId11"/>
+    <p:sldId id="260" r:id="rId12"/>
+    <p:sldId id="261" r:id="rId13"/>
+    <p:sldId id="266" r:id="rId14"/>
+    <p:sldId id="277" r:id="rId15"/>
+    <p:sldId id="276" r:id="rId16"/>
+    <p:sldId id="275" r:id="rId17"/>
+    <p:sldId id="274" r:id="rId18"/>
+    <p:sldId id="273" r:id="rId19"/>
+    <p:sldId id="272" r:id="rId20"/>
+    <p:sldId id="271" r:id="rId21"/>
+    <p:sldId id="270" r:id="rId22"/>
+    <p:sldId id="269" r:id="rId23"/>
+    <p:sldId id="267" r:id="rId24"/>
+    <p:sldId id="278" r:id="rId25"/>
+    <p:sldId id="268" r:id="rId26"/>
+    <p:sldId id="265" r:id="rId27"/>
+    <p:sldId id="264" r:id="rId28"/>
+    <p:sldId id="263" r:id="rId29"/>
+    <p:sldId id="262" r:id="rId30"/>
   </p:sldIdLst>
   <p:sldSz cx="12192000" cy="6858000"/>
   <p:notesSz cx="6858000" cy="9144000"/>
@@ -131,6 +132,11 @@
       </a:defRPr>
     </a:lvl9pPr>
   </p:defaultTextStyle>
+  <p:extLst>
+    <p:ext uri="{EFAFB233-063F-42B5-8137-9DF3F51BA10A}">
+      <p15:sldGuideLst xmlns:p15="http://schemas.microsoft.com/office/powerpoint/2012/main"/>
+    </p:ext>
+  </p:extLst>
 </p:presentation>
 </file>
 
@@ -283,7 +289,7 @@
           <a:p>
             <a:fld id="{EE596E7C-BCA1-41EC-987D-6585510C9CD8}" type="datetimeFigureOut">
               <a:rPr lang="en-IN" smtClean="0"/>
-              <a:t>24-05-2026</a:t>
+              <a:t>09-06-2026</a:t>
             </a:fld>
             <a:endParaRPr lang="en-IN"/>
           </a:p>
@@ -483,7 +489,7 @@
           <a:p>
             <a:fld id="{EE596E7C-BCA1-41EC-987D-6585510C9CD8}" type="datetimeFigureOut">
               <a:rPr lang="en-IN" smtClean="0"/>
-              <a:t>24-05-2026</a:t>
+              <a:t>09-06-2026</a:t>
             </a:fld>
             <a:endParaRPr lang="en-IN"/>
           </a:p>
@@ -693,7 +699,7 @@
           <a:p>
             <a:fld id="{EE596E7C-BCA1-41EC-987D-6585510C9CD8}" type="datetimeFigureOut">
               <a:rPr lang="en-IN" smtClean="0"/>
-              <a:t>24-05-2026</a:t>
+              <a:t>09-06-2026</a:t>
             </a:fld>
             <a:endParaRPr lang="en-IN"/>
           </a:p>
@@ -893,7 +899,7 @@
           <a:p>
             <a:fld id="{EE596E7C-BCA1-41EC-987D-6585510C9CD8}" type="datetimeFigureOut">
               <a:rPr lang="en-IN" smtClean="0"/>
-              <a:t>24-05-2026</a:t>
+              <a:t>09-06-2026</a:t>
             </a:fld>
             <a:endParaRPr lang="en-IN"/>
           </a:p>
@@ -1169,7 +1175,7 @@
           <a:p>
             <a:fld id="{EE596E7C-BCA1-41EC-987D-6585510C9CD8}" type="datetimeFigureOut">
               <a:rPr lang="en-IN" smtClean="0"/>
-              <a:t>24-05-2026</a:t>
+              <a:t>09-06-2026</a:t>
             </a:fld>
             <a:endParaRPr lang="en-IN"/>
           </a:p>
@@ -1437,7 +1443,7 @@
           <a:p>
             <a:fld id="{EE596E7C-BCA1-41EC-987D-6585510C9CD8}" type="datetimeFigureOut">
               <a:rPr lang="en-IN" smtClean="0"/>
-              <a:t>24-05-2026</a:t>
+              <a:t>09-06-2026</a:t>
             </a:fld>
             <a:endParaRPr lang="en-IN"/>
           </a:p>
@@ -1852,7 +1858,7 @@
           <a:p>
             <a:fld id="{EE596E7C-BCA1-41EC-987D-6585510C9CD8}" type="datetimeFigureOut">
               <a:rPr lang="en-IN" smtClean="0"/>
-              <a:t>24-05-2026</a:t>
+              <a:t>09-06-2026</a:t>
             </a:fld>
             <a:endParaRPr lang="en-IN"/>
           </a:p>
@@ -1994,7 +2000,7 @@
           <a:p>
             <a:fld id="{EE596E7C-BCA1-41EC-987D-6585510C9CD8}" type="datetimeFigureOut">
               <a:rPr lang="en-IN" smtClean="0"/>
-              <a:t>24-05-2026</a:t>
+              <a:t>09-06-2026</a:t>
             </a:fld>
             <a:endParaRPr lang="en-IN"/>
           </a:p>
@@ -2107,7 +2113,7 @@
           <a:p>
             <a:fld id="{EE596E7C-BCA1-41EC-987D-6585510C9CD8}" type="datetimeFigureOut">
               <a:rPr lang="en-IN" smtClean="0"/>
-              <a:t>24-05-2026</a:t>
+              <a:t>09-06-2026</a:t>
             </a:fld>
             <a:endParaRPr lang="en-IN"/>
           </a:p>
@@ -2420,7 +2426,7 @@
           <a:p>
             <a:fld id="{EE596E7C-BCA1-41EC-987D-6585510C9CD8}" type="datetimeFigureOut">
               <a:rPr lang="en-IN" smtClean="0"/>
-              <a:t>24-05-2026</a:t>
+              <a:t>09-06-2026</a:t>
             </a:fld>
             <a:endParaRPr lang="en-IN"/>
           </a:p>
@@ -2709,7 +2715,7 @@
           <a:p>
             <a:fld id="{EE596E7C-BCA1-41EC-987D-6585510C9CD8}" type="datetimeFigureOut">
               <a:rPr lang="en-IN" smtClean="0"/>
-              <a:t>24-05-2026</a:t>
+              <a:t>09-06-2026</a:t>
             </a:fld>
             <a:endParaRPr lang="en-IN"/>
           </a:p>
@@ -2952,7 +2958,7 @@
           <a:p>
             <a:fld id="{EE596E7C-BCA1-41EC-987D-6585510C9CD8}" type="datetimeFigureOut">
               <a:rPr lang="en-IN" smtClean="0"/>
-              <a:t>24-05-2026</a:t>
+              <a:t>09-06-2026</a:t>
             </a:fld>
             <a:endParaRPr lang="en-IN"/>
           </a:p>
@@ -3371,10 +3377,10 @@
       </p:grpSpPr>
       <p:sp>
         <p:nvSpPr>
-          <p:cNvPr id="2" name="Title 1">
-            <a:extLst>
-              <a:ext uri="{FF2B5EF4-FFF2-40B4-BE49-F238E27FC236}">
-                <a16:creationId xmlns:a16="http://schemas.microsoft.com/office/drawing/2014/main" id="{20C34D2A-375D-B01B-5A82-E29B97DCC1AE}"/>
+          <p:cNvPr id="4" name="Title 3">
+            <a:extLst>
+              <a:ext uri="{FF2B5EF4-FFF2-40B4-BE49-F238E27FC236}">
+                <a16:creationId xmlns:a16="http://schemas.microsoft.com/office/drawing/2014/main" id="{C533DF91-90E0-50CA-A8B2-78E2934BA4C1}"/>
               </a:ext>
             </a:extLst>
           </p:cNvPr>
@@ -3385,21 +3391,37 @@
             <p:ph type="ctrTitle"/>
           </p:nvPr>
         </p:nvSpPr>
-        <p:spPr/>
+        <p:spPr>
+          <a:xfrm>
+            <a:off x="1376516" y="276789"/>
+            <a:ext cx="9144000" cy="2387600"/>
+          </a:xfrm>
+        </p:spPr>
         <p:txBody>
           <a:bodyPr/>
           <a:lstStyle/>
           <a:p>
-            <a:endParaRPr lang="en-IN" dirty="0"/>
-          </a:p>
-        </p:txBody>
-      </p:sp>
-      <p:sp>
-        <p:nvSpPr>
-          <p:cNvPr id="3" name="Subtitle 2">
-            <a:extLst>
-              <a:ext uri="{FF2B5EF4-FFF2-40B4-BE49-F238E27FC236}">
-                <a16:creationId xmlns:a16="http://schemas.microsoft.com/office/drawing/2014/main" id="{EC53A0F0-72E5-CE00-EB46-6704801DEDFE}"/>
+            <a:r>
+              <a:rPr lang="en-US" b="1" dirty="0"/>
+              <a:t>SQL</a:t>
+            </a:r>
+            <a:br>
+              <a:rPr lang="en-US" b="1" dirty="0"/>
+            </a:br>
+            <a:r>
+              <a:rPr lang="en-US" b="1" dirty="0"/>
+              <a:t>Structured Query Language</a:t>
+            </a:r>
+            <a:endParaRPr lang="en-IN" b="1" dirty="0"/>
+          </a:p>
+        </p:txBody>
+      </p:sp>
+      <p:sp>
+        <p:nvSpPr>
+          <p:cNvPr id="5" name="Subtitle 4">
+            <a:extLst>
+              <a:ext uri="{FF2B5EF4-FFF2-40B4-BE49-F238E27FC236}">
+                <a16:creationId xmlns:a16="http://schemas.microsoft.com/office/drawing/2014/main" id="{F7B65E88-F98B-5C28-5D0E-EA6117454E9E}"/>
               </a:ext>
             </a:extLst>
           </p:cNvPr>
@@ -3410,12 +3432,48 @@
             <p:ph type="subTitle" idx="1"/>
           </p:nvPr>
         </p:nvSpPr>
-        <p:spPr/>
-        <p:txBody>
-          <a:bodyPr/>
-          <a:lstStyle/>
-          <a:p>
-            <a:endParaRPr lang="en-IN"/>
+        <p:spPr>
+          <a:xfrm>
+            <a:off x="1524000" y="4113316"/>
+            <a:ext cx="9144000" cy="1655762"/>
+          </a:xfrm>
+        </p:spPr>
+        <p:txBody>
+          <a:bodyPr numCol="2">
+            <a:normAutofit fontScale="92500" lnSpcReduction="10000"/>
+          </a:bodyPr>
+          <a:lstStyle/>
+          <a:p>
+            <a:pPr algn="l"/>
+            <a:r>
+              <a:rPr lang="en-US" sz="3600" dirty="0"/>
+              <a:t>Under Guidance:</a:t>
+            </a:r>
+          </a:p>
+          <a:p>
+            <a:pPr algn="l"/>
+            <a:r>
+              <a:rPr lang="en-US" sz="3600" b="1" dirty="0"/>
+              <a:t>Ms. AARTHI B</a:t>
+            </a:r>
+          </a:p>
+          <a:p>
+            <a:pPr algn="l"/>
+            <a:endParaRPr lang="en-US" sz="3600" dirty="0"/>
+          </a:p>
+          <a:p>
+            <a:pPr algn="r"/>
+            <a:r>
+              <a:rPr lang="en-US" sz="3600" dirty="0"/>
+              <a:t>Presented By:</a:t>
+            </a:r>
+          </a:p>
+          <a:p>
+            <a:pPr algn="r"/>
+            <a:r>
+              <a:rPr lang="en-US" sz="3600" b="1" dirty="0"/>
+              <a:t>VARUNESH T</a:t>
+            </a:r>
           </a:p>
         </p:txBody>
       </p:sp>
@@ -3433,6 +3491,267 @@
 </file>
 
 <file path=ppt/slides/slide10.xml><?xml version="1.0" encoding="utf-8"?>
+<p:sld xmlns:a="http://schemas.openxmlformats.org/drawingml/2006/main" xmlns:r="http://schemas.openxmlformats.org/officeDocument/2006/relationships" xmlns:p="http://schemas.openxmlformats.org/presentationml/2006/main">
+  <p:cSld>
+    <p:spTree>
+      <p:nvGrpSpPr>
+        <p:cNvPr id="1" name="">
+          <a:extLst>
+            <a:ext uri="{FF2B5EF4-FFF2-40B4-BE49-F238E27FC236}">
+              <a16:creationId xmlns:a16="http://schemas.microsoft.com/office/drawing/2014/main" id="{FE268DC2-AA4B-64A5-FD26-DF8FD118F92C}"/>
+            </a:ext>
+          </a:extLst>
+        </p:cNvPr>
+        <p:cNvGrpSpPr/>
+        <p:nvPr/>
+      </p:nvGrpSpPr>
+      <p:grpSpPr>
+        <a:xfrm>
+          <a:off x="0" y="0"/>
+          <a:ext cx="0" cy="0"/>
+          <a:chOff x="0" y="0"/>
+          <a:chExt cx="0" cy="0"/>
+        </a:xfrm>
+      </p:grpSpPr>
+      <p:sp>
+        <p:nvSpPr>
+          <p:cNvPr id="2" name="Title 1">
+            <a:extLst>
+              <a:ext uri="{FF2B5EF4-FFF2-40B4-BE49-F238E27FC236}">
+                <a16:creationId xmlns:a16="http://schemas.microsoft.com/office/drawing/2014/main" id="{F3EB253C-B181-2E24-743C-51B53E4FFA0B}"/>
+              </a:ext>
+            </a:extLst>
+          </p:cNvPr>
+          <p:cNvSpPr>
+            <a:spLocks noGrp="1"/>
+          </p:cNvSpPr>
+          <p:nvPr>
+            <p:ph type="title"/>
+          </p:nvPr>
+        </p:nvSpPr>
+        <p:spPr/>
+        <p:txBody>
+          <a:bodyPr>
+            <a:normAutofit/>
+          </a:bodyPr>
+          <a:lstStyle/>
+          <a:p>
+            <a:r>
+              <a:rPr lang="en-US" sz="2400" dirty="0"/>
+              <a:t>2. Write a query to display customers who booked rooms between room IDs 1 and 5 using Customers and Bookings tables.</a:t>
+            </a:r>
+            <a:endParaRPr lang="en-IN" sz="2400" dirty="0"/>
+          </a:p>
+        </p:txBody>
+      </p:sp>
+      <p:sp>
+        <p:nvSpPr>
+          <p:cNvPr id="3" name="Content Placeholder 2">
+            <a:extLst>
+              <a:ext uri="{FF2B5EF4-FFF2-40B4-BE49-F238E27FC236}">
+                <a16:creationId xmlns:a16="http://schemas.microsoft.com/office/drawing/2014/main" id="{10D03B1B-66E3-9B66-AAFA-58C341FF73E9}"/>
+              </a:ext>
+            </a:extLst>
+          </p:cNvPr>
+          <p:cNvSpPr>
+            <a:spLocks noGrp="1"/>
+          </p:cNvSpPr>
+          <p:nvPr>
+            <p:ph idx="1"/>
+          </p:nvPr>
+        </p:nvSpPr>
+        <p:spPr/>
+        <p:txBody>
+          <a:bodyPr numCol="2"/>
+          <a:lstStyle/>
+          <a:p>
+            <a:pPr marL="0" indent="0">
+              <a:buNone/>
+            </a:pPr>
+            <a:r>
+              <a:rPr lang="en-IN" b="1" dirty="0"/>
+              <a:t>Query:</a:t>
+            </a:r>
+          </a:p>
+          <a:p>
+            <a:pPr marL="457200" lvl="1" indent="0">
+              <a:buNone/>
+            </a:pPr>
+            <a:endParaRPr lang="en-IN" dirty="0"/>
+          </a:p>
+          <a:p>
+            <a:pPr marL="457200" lvl="1" indent="0">
+              <a:buNone/>
+            </a:pPr>
+            <a:r>
+              <a:rPr lang="en-US" dirty="0"/>
+              <a:t>SELECT </a:t>
+            </a:r>
+            <a:r>
+              <a:rPr lang="en-US" dirty="0" err="1"/>
+              <a:t>c.first_name</a:t>
+            </a:r>
+            <a:r>
+              <a:rPr lang="en-US" dirty="0"/>
+              <a:t>,</a:t>
+            </a:r>
+          </a:p>
+          <a:p>
+            <a:pPr marL="457200" lvl="1" indent="0">
+              <a:buNone/>
+            </a:pPr>
+            <a:r>
+              <a:rPr lang="en-US" dirty="0"/>
+              <a:t>       </a:t>
+            </a:r>
+            <a:r>
+              <a:rPr lang="en-US" dirty="0" err="1"/>
+              <a:t>c.last_name</a:t>
+            </a:r>
+            <a:r>
+              <a:rPr lang="en-US" dirty="0"/>
+              <a:t>,</a:t>
+            </a:r>
+          </a:p>
+          <a:p>
+            <a:pPr marL="457200" lvl="1" indent="0">
+              <a:buNone/>
+            </a:pPr>
+            <a:r>
+              <a:rPr lang="en-US" dirty="0"/>
+              <a:t>       </a:t>
+            </a:r>
+            <a:r>
+              <a:rPr lang="en-US" dirty="0" err="1"/>
+              <a:t>b.room_id</a:t>
+            </a:r>
+            <a:endParaRPr lang="en-US" dirty="0"/>
+          </a:p>
+          <a:p>
+            <a:pPr marL="457200" lvl="1" indent="0">
+              <a:buNone/>
+            </a:pPr>
+            <a:r>
+              <a:rPr lang="en-US" dirty="0"/>
+              <a:t>FROM Customers c</a:t>
+            </a:r>
+          </a:p>
+          <a:p>
+            <a:pPr marL="457200" lvl="1" indent="0">
+              <a:buNone/>
+            </a:pPr>
+            <a:r>
+              <a:rPr lang="en-US" dirty="0"/>
+              <a:t>INNER JOIN Bookings b</a:t>
+            </a:r>
+          </a:p>
+          <a:p>
+            <a:pPr marL="457200" lvl="1" indent="0">
+              <a:buNone/>
+            </a:pPr>
+            <a:r>
+              <a:rPr lang="en-US" dirty="0"/>
+              <a:t>ON </a:t>
+            </a:r>
+            <a:r>
+              <a:rPr lang="en-US" dirty="0" err="1"/>
+              <a:t>c.customer_id</a:t>
+            </a:r>
+            <a:r>
+              <a:rPr lang="en-US" dirty="0"/>
+              <a:t> = </a:t>
+            </a:r>
+            <a:r>
+              <a:rPr lang="en-US" dirty="0" err="1"/>
+              <a:t>b.customer_id</a:t>
+            </a:r>
+            <a:endParaRPr lang="en-US" dirty="0"/>
+          </a:p>
+          <a:p>
+            <a:pPr marL="457200" lvl="1" indent="0">
+              <a:buNone/>
+            </a:pPr>
+            <a:r>
+              <a:rPr lang="en-US" dirty="0"/>
+              <a:t>WHERE </a:t>
+            </a:r>
+            <a:r>
+              <a:rPr lang="en-US" dirty="0" err="1"/>
+              <a:t>b.room_id</a:t>
+            </a:r>
+            <a:r>
+              <a:rPr lang="en-US" dirty="0"/>
+              <a:t> BETWEEN 1 AND 5;</a:t>
+            </a:r>
+          </a:p>
+          <a:p>
+            <a:pPr marL="457200" lvl="1" indent="0">
+              <a:buNone/>
+            </a:pPr>
+            <a:endParaRPr lang="en-US" dirty="0"/>
+          </a:p>
+          <a:p>
+            <a:pPr marL="457200" lvl="1" indent="0">
+              <a:buNone/>
+            </a:pPr>
+            <a:r>
+              <a:rPr lang="en-US" sz="2800" b="1" dirty="0"/>
+              <a:t>Output:</a:t>
+            </a:r>
+            <a:endParaRPr lang="en-IN" b="1" dirty="0"/>
+          </a:p>
+        </p:txBody>
+      </p:sp>
+      <p:pic>
+        <p:nvPicPr>
+          <p:cNvPr id="5" name="Picture 4">
+            <a:extLst>
+              <a:ext uri="{FF2B5EF4-FFF2-40B4-BE49-F238E27FC236}">
+                <a16:creationId xmlns:a16="http://schemas.microsoft.com/office/drawing/2014/main" id="{02822D50-9E41-2F4F-B0BE-10829D10439C}"/>
+              </a:ext>
+            </a:extLst>
+          </p:cNvPr>
+          <p:cNvPicPr>
+            <a:picLocks noChangeAspect="1"/>
+          </p:cNvPicPr>
+          <p:nvPr/>
+        </p:nvPicPr>
+        <p:blipFill>
+          <a:blip r:embed="rId2">
+            <a:extLst>
+              <a:ext uri="{28A0092B-C50C-407E-A947-70E740481C1C}">
+                <a14:useLocalDpi xmlns:a14="http://schemas.microsoft.com/office/drawing/2010/main" val="0"/>
+              </a:ext>
+            </a:extLst>
+          </a:blip>
+          <a:stretch>
+            <a:fillRect/>
+          </a:stretch>
+        </p:blipFill>
+        <p:spPr>
+          <a:xfrm>
+            <a:off x="7549378" y="2598085"/>
+            <a:ext cx="2676170" cy="3578878"/>
+          </a:xfrm>
+          <a:prstGeom prst="rect">
+            <a:avLst/>
+          </a:prstGeom>
+        </p:spPr>
+      </p:pic>
+    </p:spTree>
+    <p:extLst>
+      <p:ext uri="{BB962C8B-B14F-4D97-AF65-F5344CB8AC3E}">
+        <p14:creationId xmlns:p14="http://schemas.microsoft.com/office/powerpoint/2010/main" val="428483957"/>
+      </p:ext>
+    </p:extLst>
+  </p:cSld>
+  <p:clrMapOvr>
+    <a:masterClrMapping/>
+  </p:clrMapOvr>
+</p:sld>
+</file>
+
+<file path=ppt/slides/slide11.xml><?xml version="1.0" encoding="utf-8"?>
 <p:sld xmlns:a="http://schemas.openxmlformats.org/drawingml/2006/main" xmlns:r="http://schemas.openxmlformats.org/officeDocument/2006/relationships" xmlns:p="http://schemas.openxmlformats.org/presentationml/2006/main">
   <p:cSld>
     <p:spTree>
@@ -3636,7 +3955,7 @@
 </p:sld>
 </file>
 
-<file path=ppt/slides/slide11.xml><?xml version="1.0" encoding="utf-8"?>
+<file path=ppt/slides/slide12.xml><?xml version="1.0" encoding="utf-8"?>
 <p:sld xmlns:a="http://schemas.openxmlformats.org/drawingml/2006/main" xmlns:r="http://schemas.openxmlformats.org/officeDocument/2006/relationships" xmlns:p="http://schemas.openxmlformats.org/presentationml/2006/main">
   <p:cSld>
     <p:spTree>
@@ -3859,7 +4178,7 @@
 </p:sld>
 </file>
 
-<file path=ppt/slides/slide12.xml><?xml version="1.0" encoding="utf-8"?>
+<file path=ppt/slides/slide13.xml><?xml version="1.0" encoding="utf-8"?>
 <p:sld xmlns:a="http://schemas.openxmlformats.org/drawingml/2006/main" xmlns:r="http://schemas.openxmlformats.org/officeDocument/2006/relationships" xmlns:p="http://schemas.openxmlformats.org/presentationml/2006/main">
   <p:cSld>
     <p:spTree>
@@ -4117,7 +4436,7 @@
 </p:sld>
 </file>
 
-<file path=ppt/slides/slide13.xml><?xml version="1.0" encoding="utf-8"?>
+<file path=ppt/slides/slide14.xml><?xml version="1.0" encoding="utf-8"?>
 <p:sld xmlns:a="http://schemas.openxmlformats.org/drawingml/2006/main" xmlns:r="http://schemas.openxmlformats.org/officeDocument/2006/relationships" xmlns:p="http://schemas.openxmlformats.org/presentationml/2006/main">
   <p:cSld>
     <p:spTree>
@@ -4423,7 +4742,7 @@
 </p:sld>
 </file>
 
-<file path=ppt/slides/slide14.xml><?xml version="1.0" encoding="utf-8"?>
+<file path=ppt/slides/slide15.xml><?xml version="1.0" encoding="utf-8"?>
 <p:sld xmlns:a="http://schemas.openxmlformats.org/drawingml/2006/main" xmlns:r="http://schemas.openxmlformats.org/officeDocument/2006/relationships" xmlns:p="http://schemas.openxmlformats.org/presentationml/2006/main">
   <p:cSld>
     <p:spTree>
@@ -4725,7 +5044,7 @@
 </p:sld>
 </file>
 
-<file path=ppt/slides/slide15.xml><?xml version="1.0" encoding="utf-8"?>
+<file path=ppt/slides/slide16.xml><?xml version="1.0" encoding="utf-8"?>
 <p:sld xmlns:a="http://schemas.openxmlformats.org/drawingml/2006/main" xmlns:r="http://schemas.openxmlformats.org/officeDocument/2006/relationships" xmlns:p="http://schemas.openxmlformats.org/presentationml/2006/main">
   <p:cSld>
     <p:spTree>
@@ -4945,7 +5264,7 @@
 </p:sld>
 </file>
 
-<file path=ppt/slides/slide16.xml><?xml version="1.0" encoding="utf-8"?>
+<file path=ppt/slides/slide17.xml><?xml version="1.0" encoding="utf-8"?>
 <p:sld xmlns:a="http://schemas.openxmlformats.org/drawingml/2006/main" xmlns:r="http://schemas.openxmlformats.org/officeDocument/2006/relationships" xmlns:p="http://schemas.openxmlformats.org/presentationml/2006/main">
   <p:cSld>
     <p:spTree>
@@ -5117,7 +5436,7 @@
 </p:sld>
 </file>
 
-<file path=ppt/slides/slide17.xml><?xml version="1.0" encoding="utf-8"?>
+<file path=ppt/slides/slide18.xml><?xml version="1.0" encoding="utf-8"?>
 <p:sld xmlns:a="http://schemas.openxmlformats.org/drawingml/2006/main" xmlns:r="http://schemas.openxmlformats.org/officeDocument/2006/relationships" xmlns:p="http://schemas.openxmlformats.org/presentationml/2006/main">
   <p:cSld>
     <p:spTree>
@@ -5356,7 +5675,7 @@
 </p:sld>
 </file>
 
-<file path=ppt/slides/slide18.xml><?xml version="1.0" encoding="utf-8"?>
+<file path=ppt/slides/slide19.xml><?xml version="1.0" encoding="utf-8"?>
 <p:sld xmlns:a="http://schemas.openxmlformats.org/drawingml/2006/main" xmlns:r="http://schemas.openxmlformats.org/officeDocument/2006/relationships" xmlns:p="http://schemas.openxmlformats.org/presentationml/2006/main">
   <p:cSld>
     <p:spTree>
@@ -5587,7 +5906,109 @@
 </p:sld>
 </file>
 
-<file path=ppt/slides/slide19.xml><?xml version="1.0" encoding="utf-8"?>
+<file path=ppt/slides/slide2.xml><?xml version="1.0" encoding="utf-8"?>
+<p:sld xmlns:a="http://schemas.openxmlformats.org/drawingml/2006/main" xmlns:r="http://schemas.openxmlformats.org/officeDocument/2006/relationships" xmlns:p="http://schemas.openxmlformats.org/presentationml/2006/main">
+  <p:cSld>
+    <p:spTree>
+      <p:nvGrpSpPr>
+        <p:cNvPr id="1" name=""/>
+        <p:cNvGrpSpPr/>
+        <p:nvPr/>
+      </p:nvGrpSpPr>
+      <p:grpSpPr>
+        <a:xfrm>
+          <a:off x="0" y="0"/>
+          <a:ext cx="0" cy="0"/>
+          <a:chOff x="0" y="0"/>
+          <a:chExt cx="0" cy="0"/>
+        </a:xfrm>
+      </p:grpSpPr>
+      <p:sp>
+        <p:nvSpPr>
+          <p:cNvPr id="2" name="Title 1">
+            <a:extLst>
+              <a:ext uri="{FF2B5EF4-FFF2-40B4-BE49-F238E27FC236}">
+                <a16:creationId xmlns:a16="http://schemas.microsoft.com/office/drawing/2014/main" id="{D88ACDD1-00D1-D9EC-9DA1-0D9BA9770B62}"/>
+              </a:ext>
+            </a:extLst>
+          </p:cNvPr>
+          <p:cNvSpPr>
+            <a:spLocks noGrp="1"/>
+          </p:cNvSpPr>
+          <p:nvPr>
+            <p:ph type="title"/>
+          </p:nvPr>
+        </p:nvSpPr>
+        <p:spPr/>
+        <p:txBody>
+          <a:bodyPr/>
+          <a:lstStyle/>
+          <a:p>
+            <a:r>
+              <a:rPr lang="en-US" dirty="0"/>
+              <a:t>Project Titel:</a:t>
+            </a:r>
+            <a:endParaRPr lang="en-IN" dirty="0"/>
+          </a:p>
+        </p:txBody>
+      </p:sp>
+      <p:sp>
+        <p:nvSpPr>
+          <p:cNvPr id="3" name="Content Placeholder 2">
+            <a:extLst>
+              <a:ext uri="{FF2B5EF4-FFF2-40B4-BE49-F238E27FC236}">
+                <a16:creationId xmlns:a16="http://schemas.microsoft.com/office/drawing/2014/main" id="{23E0ECE7-C13F-2E7E-DF6D-353FBE2A26BF}"/>
+              </a:ext>
+            </a:extLst>
+          </p:cNvPr>
+          <p:cNvSpPr>
+            <a:spLocks noGrp="1"/>
+          </p:cNvSpPr>
+          <p:nvPr>
+            <p:ph idx="1"/>
+          </p:nvPr>
+        </p:nvSpPr>
+        <p:spPr/>
+        <p:txBody>
+          <a:bodyPr>
+            <a:normAutofit/>
+          </a:bodyPr>
+          <a:lstStyle/>
+          <a:p>
+            <a:pPr marL="0" indent="0">
+              <a:buNone/>
+            </a:pPr>
+            <a:r>
+              <a:rPr lang="en-US" sz="5400" dirty="0"/>
+              <a:t>Hotel Management</a:t>
+            </a:r>
+          </a:p>
+          <a:p>
+            <a:pPr marL="0" indent="0">
+              <a:buNone/>
+            </a:pPr>
+            <a:r>
+              <a:rPr lang="en-US" sz="5400" dirty="0"/>
+              <a:t>System</a:t>
+            </a:r>
+            <a:endParaRPr lang="en-IN" sz="5400" dirty="0"/>
+          </a:p>
+        </p:txBody>
+      </p:sp>
+    </p:spTree>
+    <p:extLst>
+      <p:ext uri="{BB962C8B-B14F-4D97-AF65-F5344CB8AC3E}">
+        <p14:creationId xmlns:p14="http://schemas.microsoft.com/office/powerpoint/2010/main" val="860763456"/>
+      </p:ext>
+    </p:extLst>
+  </p:cSld>
+  <p:clrMapOvr>
+    <a:masterClrMapping/>
+  </p:clrMapOvr>
+</p:sld>
+</file>
+
+<file path=ppt/slides/slide20.xml><?xml version="1.0" encoding="utf-8"?>
 <p:sld xmlns:a="http://schemas.openxmlformats.org/drawingml/2006/main" xmlns:r="http://schemas.openxmlformats.org/officeDocument/2006/relationships" xmlns:p="http://schemas.openxmlformats.org/presentationml/2006/main">
   <p:cSld>
     <p:spTree>
@@ -5778,127 +6199,7 @@
 </p:sld>
 </file>
 
-<file path=ppt/slides/slide2.xml><?xml version="1.0" encoding="utf-8"?>
-<p:sld xmlns:a="http://schemas.openxmlformats.org/drawingml/2006/main" xmlns:r="http://schemas.openxmlformats.org/officeDocument/2006/relationships" xmlns:p="http://schemas.openxmlformats.org/presentationml/2006/main">
-  <p:cSld>
-    <p:spTree>
-      <p:nvGrpSpPr>
-        <p:cNvPr id="1" name=""/>
-        <p:cNvGrpSpPr/>
-        <p:nvPr/>
-      </p:nvGrpSpPr>
-      <p:grpSpPr>
-        <a:xfrm>
-          <a:off x="0" y="0"/>
-          <a:ext cx="0" cy="0"/>
-          <a:chOff x="0" y="0"/>
-          <a:chExt cx="0" cy="0"/>
-        </a:xfrm>
-      </p:grpSpPr>
-      <p:sp>
-        <p:nvSpPr>
-          <p:cNvPr id="2" name="Title 1">
-            <a:extLst>
-              <a:ext uri="{FF2B5EF4-FFF2-40B4-BE49-F238E27FC236}">
-                <a16:creationId xmlns:a16="http://schemas.microsoft.com/office/drawing/2014/main" id="{D5D466B9-51AE-897F-153E-E179AA1545C9}"/>
-              </a:ext>
-            </a:extLst>
-          </p:cNvPr>
-          <p:cNvSpPr>
-            <a:spLocks noGrp="1"/>
-          </p:cNvSpPr>
-          <p:nvPr>
-            <p:ph type="title"/>
-          </p:nvPr>
-        </p:nvSpPr>
-        <p:spPr/>
-        <p:txBody>
-          <a:bodyPr>
-            <a:normAutofit/>
-          </a:bodyPr>
-          <a:lstStyle/>
-          <a:p>
-            <a:r>
-              <a:rPr lang="en-US" sz="3600" b="1" dirty="0">
-                <a:latin typeface="Times New Roman" panose="02020603050405020304" pitchFamily="18" charset="0"/>
-                <a:cs typeface="Times New Roman" panose="02020603050405020304" pitchFamily="18" charset="0"/>
-              </a:rPr>
-              <a:t>What is SQL?</a:t>
-            </a:r>
-            <a:endParaRPr lang="en-IN" sz="3600" b="1" dirty="0">
-              <a:latin typeface="Times New Roman" panose="02020603050405020304" pitchFamily="18" charset="0"/>
-              <a:cs typeface="Times New Roman" panose="02020603050405020304" pitchFamily="18" charset="0"/>
-            </a:endParaRPr>
-          </a:p>
-        </p:txBody>
-      </p:sp>
-      <p:sp>
-        <p:nvSpPr>
-          <p:cNvPr id="3" name="Content Placeholder 2">
-            <a:extLst>
-              <a:ext uri="{FF2B5EF4-FFF2-40B4-BE49-F238E27FC236}">
-                <a16:creationId xmlns:a16="http://schemas.microsoft.com/office/drawing/2014/main" id="{DA6D43BF-22AC-3F07-AF6B-1FC19FA37B65}"/>
-              </a:ext>
-            </a:extLst>
-          </p:cNvPr>
-          <p:cNvSpPr>
-            <a:spLocks noGrp="1"/>
-          </p:cNvSpPr>
-          <p:nvPr>
-            <p:ph idx="1"/>
-          </p:nvPr>
-        </p:nvSpPr>
-        <p:spPr/>
-        <p:txBody>
-          <a:bodyPr/>
-          <a:lstStyle/>
-          <a:p>
-            <a:pPr algn="just"/>
-            <a:r>
-              <a:rPr lang="en-IN" b="1" dirty="0">
-                <a:latin typeface="Times New Roman" panose="02020603050405020304" pitchFamily="18" charset="0"/>
-                <a:cs typeface="Times New Roman" panose="02020603050405020304" pitchFamily="18" charset="0"/>
-              </a:rPr>
-              <a:t>Structured Query Language</a:t>
-            </a:r>
-            <a:r>
-              <a:rPr lang="en-IN" dirty="0">
-                <a:latin typeface="Times New Roman" panose="02020603050405020304" pitchFamily="18" charset="0"/>
-                <a:cs typeface="Times New Roman" panose="02020603050405020304" pitchFamily="18" charset="0"/>
-              </a:rPr>
-              <a:t> (</a:t>
-            </a:r>
-            <a:r>
-              <a:rPr lang="en-IN" b="1" dirty="0">
-                <a:latin typeface="Times New Roman" panose="02020603050405020304" pitchFamily="18" charset="0"/>
-                <a:cs typeface="Times New Roman" panose="02020603050405020304" pitchFamily="18" charset="0"/>
-              </a:rPr>
-              <a:t>SQL</a:t>
-            </a:r>
-            <a:r>
-              <a:rPr lang="en-IN" dirty="0">
-                <a:latin typeface="Times New Roman" panose="02020603050405020304" pitchFamily="18" charset="0"/>
-                <a:cs typeface="Times New Roman" panose="02020603050405020304" pitchFamily="18" charset="0"/>
-              </a:rPr>
-              <a:t>)  is a domain-specific language used to manage data, especially in a relational database management system (RDBMS). It is particularly useful in handling structured data, i.e., data incorporating relations among entities and variables.</a:t>
-            </a:r>
-          </a:p>
-        </p:txBody>
-      </p:sp>
-    </p:spTree>
-    <p:extLst>
-      <p:ext uri="{BB962C8B-B14F-4D97-AF65-F5344CB8AC3E}">
-        <p14:creationId xmlns:p14="http://schemas.microsoft.com/office/powerpoint/2010/main" val="3503988003"/>
-      </p:ext>
-    </p:extLst>
-  </p:cSld>
-  <p:clrMapOvr>
-    <a:masterClrMapping/>
-  </p:clrMapOvr>
-</p:sld>
-</file>
-
-<file path=ppt/slides/slide20.xml><?xml version="1.0" encoding="utf-8"?>
+<file path=ppt/slides/slide21.xml><?xml version="1.0" encoding="utf-8"?>
 <p:sld xmlns:a="http://schemas.openxmlformats.org/drawingml/2006/main" xmlns:r="http://schemas.openxmlformats.org/officeDocument/2006/relationships" xmlns:p="http://schemas.openxmlformats.org/presentationml/2006/main">
   <p:cSld>
     <p:spTree>
@@ -6129,7 +6430,7 @@
 </p:sld>
 </file>
 
-<file path=ppt/slides/slide21.xml><?xml version="1.0" encoding="utf-8"?>
+<file path=ppt/slides/slide22.xml><?xml version="1.0" encoding="utf-8"?>
 <p:sld xmlns:a="http://schemas.openxmlformats.org/drawingml/2006/main" xmlns:r="http://schemas.openxmlformats.org/officeDocument/2006/relationships" xmlns:p="http://schemas.openxmlformats.org/presentationml/2006/main">
   <p:cSld>
     <p:spTree>
@@ -6390,7 +6691,7 @@
 </p:sld>
 </file>
 
-<file path=ppt/slides/slide22.xml><?xml version="1.0" encoding="utf-8"?>
+<file path=ppt/slides/slide23.xml><?xml version="1.0" encoding="utf-8"?>
 <p:sld xmlns:a="http://schemas.openxmlformats.org/drawingml/2006/main" xmlns:r="http://schemas.openxmlformats.org/officeDocument/2006/relationships" xmlns:p="http://schemas.openxmlformats.org/presentationml/2006/main">
   <p:cSld>
     <p:spTree>
@@ -6755,7 +7056,7 @@
 </p:sld>
 </file>
 
-<file path=ppt/slides/slide23.xml><?xml version="1.0" encoding="utf-8"?>
+<file path=ppt/slides/slide24.xml><?xml version="1.0" encoding="utf-8"?>
 <p:sld xmlns:a="http://schemas.openxmlformats.org/drawingml/2006/main" xmlns:r="http://schemas.openxmlformats.org/officeDocument/2006/relationships" xmlns:p="http://schemas.openxmlformats.org/presentationml/2006/main">
   <p:cSld>
     <p:spTree>
@@ -6858,7 +7159,7 @@
 </p:sld>
 </file>
 
-<file path=ppt/slides/slide24.xml><?xml version="1.0" encoding="utf-8"?>
+<file path=ppt/slides/slide25.xml><?xml version="1.0" encoding="utf-8"?>
 <p:sld xmlns:a="http://schemas.openxmlformats.org/drawingml/2006/main" xmlns:r="http://schemas.openxmlformats.org/officeDocument/2006/relationships" xmlns:p="http://schemas.openxmlformats.org/presentationml/2006/main">
   <p:cSld>
     <p:spTree>
@@ -7118,7 +7419,7 @@
 </p:sld>
 </file>
 
-<file path=ppt/slides/slide25.xml><?xml version="1.0" encoding="utf-8"?>
+<file path=ppt/slides/slide26.xml><?xml version="1.0" encoding="utf-8"?>
 <p:sld xmlns:a="http://schemas.openxmlformats.org/drawingml/2006/main" xmlns:r="http://schemas.openxmlformats.org/officeDocument/2006/relationships" xmlns:p="http://schemas.openxmlformats.org/presentationml/2006/main">
   <p:cSld>
     <p:spTree>
@@ -7416,7 +7717,7 @@
 </p:sld>
 </file>
 
-<file path=ppt/slides/slide26.xml><?xml version="1.0" encoding="utf-8"?>
+<file path=ppt/slides/slide27.xml><?xml version="1.0" encoding="utf-8"?>
 <p:sld xmlns:a="http://schemas.openxmlformats.org/drawingml/2006/main" xmlns:r="http://schemas.openxmlformats.org/officeDocument/2006/relationships" xmlns:p="http://schemas.openxmlformats.org/presentationml/2006/main">
   <p:cSld>
     <p:spTree>
@@ -7628,7 +7929,7 @@
 </p:sld>
 </file>
 
-<file path=ppt/slides/slide27.xml><?xml version="1.0" encoding="utf-8"?>
+<file path=ppt/slides/slide28.xml><?xml version="1.0" encoding="utf-8"?>
 <p:sld xmlns:a="http://schemas.openxmlformats.org/drawingml/2006/main" xmlns:r="http://schemas.openxmlformats.org/officeDocument/2006/relationships" xmlns:p="http://schemas.openxmlformats.org/presentationml/2006/main">
   <p:cSld>
     <p:spTree>
@@ -7836,7 +8137,7 @@
 </p:sld>
 </file>
 
-<file path=ppt/slides/slide28.xml><?xml version="1.0" encoding="utf-8"?>
+<file path=ppt/slides/slide29.xml><?xml version="1.0" encoding="utf-8"?>
 <p:sld xmlns:a="http://schemas.openxmlformats.org/drawingml/2006/main" xmlns:r="http://schemas.openxmlformats.org/officeDocument/2006/relationships" xmlns:p="http://schemas.openxmlformats.org/presentationml/2006/main">
   <p:cSld>
     <p:spTree>
@@ -8061,7 +8362,7 @@
           <p:cNvPr id="2" name="Title 1">
             <a:extLst>
               <a:ext uri="{FF2B5EF4-FFF2-40B4-BE49-F238E27FC236}">
-                <a16:creationId xmlns:a16="http://schemas.microsoft.com/office/drawing/2014/main" id="{A22AC077-A97C-EC13-809B-5305DA8A3ABD}"/>
+                <a16:creationId xmlns:a16="http://schemas.microsoft.com/office/drawing/2014/main" id="{D5D466B9-51AE-897F-153E-E179AA1545C9}"/>
               </a:ext>
             </a:extLst>
           </p:cNvPr>
@@ -8084,7 +8385,7 @@
                 <a:latin typeface="Times New Roman" panose="02020603050405020304" pitchFamily="18" charset="0"/>
                 <a:cs typeface="Times New Roman" panose="02020603050405020304" pitchFamily="18" charset="0"/>
               </a:rPr>
-              <a:t>Why SQL?</a:t>
+              <a:t>What is SQL?</a:t>
             </a:r>
             <a:endParaRPr lang="en-IN" sz="3600" b="1" dirty="0">
               <a:latin typeface="Times New Roman" panose="02020603050405020304" pitchFamily="18" charset="0"/>
@@ -8098,7 +8399,7 @@
           <p:cNvPr id="3" name="Content Placeholder 2">
             <a:extLst>
               <a:ext uri="{FF2B5EF4-FFF2-40B4-BE49-F238E27FC236}">
-                <a16:creationId xmlns:a16="http://schemas.microsoft.com/office/drawing/2014/main" id="{5FBD4657-5BB1-E861-A140-2BBDACEDBD7C}"/>
+                <a16:creationId xmlns:a16="http://schemas.microsoft.com/office/drawing/2014/main" id="{DA6D43BF-22AC-3F07-AF6B-1FC19FA37B65}"/>
               </a:ext>
             </a:extLst>
           </p:cNvPr>
@@ -8111,77 +8412,37 @@
         </p:nvSpPr>
         <p:spPr/>
         <p:txBody>
-          <a:bodyPr>
-            <a:normAutofit/>
-          </a:bodyPr>
+          <a:bodyPr/>
           <a:lstStyle/>
           <a:p>
             <a:pPr algn="just"/>
             <a:r>
-              <a:rPr lang="en-US" dirty="0">
+              <a:rPr lang="en-IN" b="1" dirty="0">
                 <a:latin typeface="Times New Roman" panose="02020603050405020304" pitchFamily="18" charset="0"/>
                 <a:cs typeface="Times New Roman" panose="02020603050405020304" pitchFamily="18" charset="0"/>
               </a:rPr>
-              <a:t> It is essential for storing, updating, and retrieving large datasets efficiently, acting as the backbone for backend web development, business intelligence, and data analytics</a:t>
-            </a:r>
-          </a:p>
-          <a:p>
-            <a:r>
-              <a:rPr lang="en-US" dirty="0">
-                <a:latin typeface="Times New Roman" panose="02020603050405020304" pitchFamily="18" charset="0"/>
-                <a:cs typeface="Times New Roman" panose="02020603050405020304" pitchFamily="18" charset="0"/>
-              </a:rPr>
-              <a:t>Key reasons to use SQL include:</a:t>
-            </a:r>
-          </a:p>
-          <a:p>
-            <a:pPr lvl="1" algn="just"/>
+              <a:t>Structured Query Language</a:t>
+            </a:r>
             <a:r>
               <a:rPr lang="en-IN" dirty="0">
                 <a:latin typeface="Times New Roman" panose="02020603050405020304" pitchFamily="18" charset="0"/>
                 <a:cs typeface="Times New Roman" panose="02020603050405020304" pitchFamily="18" charset="0"/>
               </a:rPr>
-              <a:t>Handles huge data easily</a:t>
-            </a:r>
-          </a:p>
-          <a:p>
-            <a:pPr lvl="1" algn="just"/>
+              <a:t> (</a:t>
+            </a:r>
+            <a:r>
+              <a:rPr lang="en-IN" b="1" dirty="0">
+                <a:latin typeface="Times New Roman" panose="02020603050405020304" pitchFamily="18" charset="0"/>
+                <a:cs typeface="Times New Roman" panose="02020603050405020304" pitchFamily="18" charset="0"/>
+              </a:rPr>
+              <a:t>SQL</a:t>
+            </a:r>
             <a:r>
               <a:rPr lang="en-IN" dirty="0">
                 <a:latin typeface="Times New Roman" panose="02020603050405020304" pitchFamily="18" charset="0"/>
                 <a:cs typeface="Times New Roman" panose="02020603050405020304" pitchFamily="18" charset="0"/>
               </a:rPr>
-              <a:t>Easy to read </a:t>
-            </a:r>
-          </a:p>
-          <a:p>
-            <a:pPr lvl="1" algn="just"/>
-            <a:r>
-              <a:rPr lang="en-IN" dirty="0">
-                <a:latin typeface="Times New Roman" panose="02020603050405020304" pitchFamily="18" charset="0"/>
-                <a:cs typeface="Times New Roman" panose="02020603050405020304" pitchFamily="18" charset="0"/>
-              </a:rPr>
-              <a:t>Fast searching</a:t>
-            </a:r>
-          </a:p>
-          <a:p>
-            <a:pPr lvl="1" algn="just"/>
-            <a:r>
-              <a:rPr lang="en-IN" dirty="0">
-                <a:latin typeface="Times New Roman" panose="02020603050405020304" pitchFamily="18" charset="0"/>
-                <a:cs typeface="Times New Roman" panose="02020603050405020304" pitchFamily="18" charset="0"/>
-              </a:rPr>
-              <a:t>Safe and reliable</a:t>
-            </a:r>
-          </a:p>
-          <a:p>
-            <a:pPr lvl="1" algn="just"/>
-            <a:r>
-              <a:rPr lang="en-IN" dirty="0">
-                <a:latin typeface="Times New Roman" panose="02020603050405020304" pitchFamily="18" charset="0"/>
-                <a:cs typeface="Times New Roman" panose="02020603050405020304" pitchFamily="18" charset="0"/>
-              </a:rPr>
-              <a:t>Works with other tools</a:t>
+              <a:t>)  is a domain-specific language used to manage data, especially in a relational database management system (RDBMS). It is particularly useful in handling structured data, i.e., data incorporating relations among entities and variables.</a:t>
             </a:r>
           </a:p>
         </p:txBody>
@@ -8189,7 +8450,7 @@
     </p:spTree>
     <p:extLst>
       <p:ext uri="{BB962C8B-B14F-4D97-AF65-F5344CB8AC3E}">
-        <p14:creationId xmlns:p14="http://schemas.microsoft.com/office/powerpoint/2010/main" val="890952759"/>
+        <p14:creationId xmlns:p14="http://schemas.microsoft.com/office/powerpoint/2010/main" val="3503988003"/>
       </p:ext>
     </p:extLst>
   </p:cSld>
@@ -8221,7 +8482,7 @@
           <p:cNvPr id="2" name="Title 1">
             <a:extLst>
               <a:ext uri="{FF2B5EF4-FFF2-40B4-BE49-F238E27FC236}">
-                <a16:creationId xmlns:a16="http://schemas.microsoft.com/office/drawing/2014/main" id="{D8741EE0-5774-9B87-41A5-3924FE638F5B}"/>
+                <a16:creationId xmlns:a16="http://schemas.microsoft.com/office/drawing/2014/main" id="{A22AC077-A97C-EC13-809B-5305DA8A3ABD}"/>
               </a:ext>
             </a:extLst>
           </p:cNvPr>
@@ -8244,7 +8505,7 @@
                 <a:latin typeface="Times New Roman" panose="02020603050405020304" pitchFamily="18" charset="0"/>
                 <a:cs typeface="Times New Roman" panose="02020603050405020304" pitchFamily="18" charset="0"/>
               </a:rPr>
-              <a:t>What is MySQL</a:t>
+              <a:t>Why SQL?</a:t>
             </a:r>
             <a:endParaRPr lang="en-IN" sz="3600" b="1" dirty="0">
               <a:latin typeface="Times New Roman" panose="02020603050405020304" pitchFamily="18" charset="0"/>
@@ -8258,7 +8519,7 @@
           <p:cNvPr id="3" name="Content Placeholder 2">
             <a:extLst>
               <a:ext uri="{FF2B5EF4-FFF2-40B4-BE49-F238E27FC236}">
-                <a16:creationId xmlns:a16="http://schemas.microsoft.com/office/drawing/2014/main" id="{8EE473E9-B982-BA72-E60F-2331FB950C9C}"/>
+                <a16:creationId xmlns:a16="http://schemas.microsoft.com/office/drawing/2014/main" id="{5FBD4657-5BB1-E861-A140-2BBDACEDBD7C}"/>
               </a:ext>
             </a:extLst>
           </p:cNvPr>
@@ -8271,7 +8532,9 @@
         </p:nvSpPr>
         <p:spPr/>
         <p:txBody>
-          <a:bodyPr/>
+          <a:bodyPr>
+            <a:normAutofit/>
+          </a:bodyPr>
           <a:lstStyle/>
           <a:p>
             <a:pPr algn="just"/>
@@ -8280,17 +8543,26 @@
                 <a:latin typeface="Times New Roman" panose="02020603050405020304" pitchFamily="18" charset="0"/>
                 <a:cs typeface="Times New Roman" panose="02020603050405020304" pitchFamily="18" charset="0"/>
               </a:rPr>
-              <a:t>MySQL is a widely used, open-source Relational Database Management System (RDBMS). It organizes and stores data in structured, table-like formats and uses Structured Query Language (SQL) to manage, query, and manipulate that data. It is the backbone for many dynamic websites and applications.</a:t>
-            </a:r>
-          </a:p>
-          <a:p>
-            <a:pPr algn="just"/>
+              <a:t> It is essential for storing, updating, and retrieving large datasets efficiently, acting as the backbone for backend web development, business intelligence, and data analytics</a:t>
+            </a:r>
+          </a:p>
+          <a:p>
+            <a:r>
+              <a:rPr lang="en-US" dirty="0">
+                <a:latin typeface="Times New Roman" panose="02020603050405020304" pitchFamily="18" charset="0"/>
+                <a:cs typeface="Times New Roman" panose="02020603050405020304" pitchFamily="18" charset="0"/>
+              </a:rPr>
+              <a:t>Key reasons to use SQL include:</a:t>
+            </a:r>
+          </a:p>
+          <a:p>
+            <a:pPr lvl="1" algn="just"/>
             <a:r>
               <a:rPr lang="en-IN" dirty="0">
                 <a:latin typeface="Times New Roman" panose="02020603050405020304" pitchFamily="18" charset="0"/>
                 <a:cs typeface="Times New Roman" panose="02020603050405020304" pitchFamily="18" charset="0"/>
               </a:rPr>
-              <a:t>Key Features &amp; Benefits</a:t>
+              <a:t>Handles huge data easily</a:t>
             </a:r>
           </a:p>
           <a:p>
@@ -8300,7 +8572,7 @@
                 <a:latin typeface="Times New Roman" panose="02020603050405020304" pitchFamily="18" charset="0"/>
                 <a:cs typeface="Times New Roman" panose="02020603050405020304" pitchFamily="18" charset="0"/>
               </a:rPr>
-              <a:t>Open-Source</a:t>
+              <a:t>Easy to read </a:t>
             </a:r>
           </a:p>
           <a:p>
@@ -8310,26 +8582,35 @@
                 <a:latin typeface="Times New Roman" panose="02020603050405020304" pitchFamily="18" charset="0"/>
                 <a:cs typeface="Times New Roman" panose="02020603050405020304" pitchFamily="18" charset="0"/>
               </a:rPr>
-              <a:t>Cross-Platform</a:t>
-            </a:r>
-            <a:endParaRPr lang="en-US" dirty="0">
-              <a:latin typeface="Times New Roman" panose="02020603050405020304" pitchFamily="18" charset="0"/>
-              <a:cs typeface="Times New Roman" panose="02020603050405020304" pitchFamily="18" charset="0"/>
-            </a:endParaRPr>
-          </a:p>
-          <a:p>
-            <a:pPr algn="just"/>
-            <a:endParaRPr lang="en-IN" dirty="0">
-              <a:latin typeface="Times New Roman" panose="02020603050405020304" pitchFamily="18" charset="0"/>
-              <a:cs typeface="Times New Roman" panose="02020603050405020304" pitchFamily="18" charset="0"/>
-            </a:endParaRPr>
+              <a:t>Fast searching</a:t>
+            </a:r>
+          </a:p>
+          <a:p>
+            <a:pPr lvl="1" algn="just"/>
+            <a:r>
+              <a:rPr lang="en-IN" dirty="0">
+                <a:latin typeface="Times New Roman" panose="02020603050405020304" pitchFamily="18" charset="0"/>
+                <a:cs typeface="Times New Roman" panose="02020603050405020304" pitchFamily="18" charset="0"/>
+              </a:rPr>
+              <a:t>Safe and reliable</a:t>
+            </a:r>
+          </a:p>
+          <a:p>
+            <a:pPr lvl="1" algn="just"/>
+            <a:r>
+              <a:rPr lang="en-IN" dirty="0">
+                <a:latin typeface="Times New Roman" panose="02020603050405020304" pitchFamily="18" charset="0"/>
+                <a:cs typeface="Times New Roman" panose="02020603050405020304" pitchFamily="18" charset="0"/>
+              </a:rPr>
+              <a:t>Works with other tools</a:t>
+            </a:r>
           </a:p>
         </p:txBody>
       </p:sp>
     </p:spTree>
     <p:extLst>
       <p:ext uri="{BB962C8B-B14F-4D97-AF65-F5344CB8AC3E}">
-        <p14:creationId xmlns:p14="http://schemas.microsoft.com/office/powerpoint/2010/main" val="583469750"/>
+        <p14:creationId xmlns:p14="http://schemas.microsoft.com/office/powerpoint/2010/main" val="890952759"/>
       </p:ext>
     </p:extLst>
   </p:cSld>
@@ -8361,7 +8642,7 @@
           <p:cNvPr id="2" name="Title 1">
             <a:extLst>
               <a:ext uri="{FF2B5EF4-FFF2-40B4-BE49-F238E27FC236}">
-                <a16:creationId xmlns:a16="http://schemas.microsoft.com/office/drawing/2014/main" id="{6058498E-0530-C03C-DC64-394C6F565700}"/>
+                <a16:creationId xmlns:a16="http://schemas.microsoft.com/office/drawing/2014/main" id="{D8741EE0-5774-9B87-41A5-3924FE638F5B}"/>
               </a:ext>
             </a:extLst>
           </p:cNvPr>
@@ -8384,7 +8665,7 @@
                 <a:latin typeface="Times New Roman" panose="02020603050405020304" pitchFamily="18" charset="0"/>
                 <a:cs typeface="Times New Roman" panose="02020603050405020304" pitchFamily="18" charset="0"/>
               </a:rPr>
-              <a:t>Why MySQL is important</a:t>
+              <a:t>What is MySQL</a:t>
             </a:r>
             <a:endParaRPr lang="en-IN" sz="3600" b="1" dirty="0">
               <a:latin typeface="Times New Roman" panose="02020603050405020304" pitchFamily="18" charset="0"/>
@@ -8398,7 +8679,7 @@
           <p:cNvPr id="3" name="Content Placeholder 2">
             <a:extLst>
               <a:ext uri="{FF2B5EF4-FFF2-40B4-BE49-F238E27FC236}">
-                <a16:creationId xmlns:a16="http://schemas.microsoft.com/office/drawing/2014/main" id="{5B8997E7-894F-9B9B-9AFB-F7F86E54A092}"/>
+                <a16:creationId xmlns:a16="http://schemas.microsoft.com/office/drawing/2014/main" id="{8EE473E9-B982-BA72-E60F-2331FB950C9C}"/>
               </a:ext>
             </a:extLst>
           </p:cNvPr>
@@ -8414,42 +8695,51 @@
           <a:bodyPr/>
           <a:lstStyle/>
           <a:p>
+            <a:pPr algn="just"/>
             <a:r>
               <a:rPr lang="en-US" dirty="0">
                 <a:latin typeface="Times New Roman" panose="02020603050405020304" pitchFamily="18" charset="0"/>
                 <a:cs typeface="Times New Roman" panose="02020603050405020304" pitchFamily="18" charset="0"/>
               </a:rPr>
-              <a:t>It is used by web developers in websites for backend data storage and data processing solutions.</a:t>
-            </a:r>
-          </a:p>
-          <a:p>
-            <a:r>
-              <a:rPr lang="en-US" dirty="0">
+              <a:t>MySQL is a widely used, open-source Relational Database Management System (RDBMS). It organizes and stores data in structured, table-like formats and uses Structured Query Language (SQL) to manage, query, and manipulate that data. It is the backbone for many dynamic websites and applications.</a:t>
+            </a:r>
+          </a:p>
+          <a:p>
+            <a:pPr algn="just"/>
+            <a:r>
+              <a:rPr lang="en-IN" dirty="0">
                 <a:latin typeface="Times New Roman" panose="02020603050405020304" pitchFamily="18" charset="0"/>
                 <a:cs typeface="Times New Roman" panose="02020603050405020304" pitchFamily="18" charset="0"/>
               </a:rPr>
-              <a:t>It is important to know about SQL for 2 reasons:</a:t>
-            </a:r>
-          </a:p>
-          <a:p>
-            <a:pPr lvl="1"/>
-            <a:r>
-              <a:rPr lang="en-US" dirty="0">
+              <a:t>Key Features &amp; Benefits</a:t>
+            </a:r>
+          </a:p>
+          <a:p>
+            <a:pPr lvl="1" algn="just"/>
+            <a:r>
+              <a:rPr lang="en-IN" dirty="0">
                 <a:latin typeface="Times New Roman" panose="02020603050405020304" pitchFamily="18" charset="0"/>
                 <a:cs typeface="Times New Roman" panose="02020603050405020304" pitchFamily="18" charset="0"/>
               </a:rPr>
-              <a:t>To get information from database.</a:t>
-            </a:r>
-          </a:p>
-          <a:p>
-            <a:pPr lvl="1"/>
-            <a:r>
-              <a:rPr lang="en-US" dirty="0">
+              <a:t>Open-Source</a:t>
+            </a:r>
+          </a:p>
+          <a:p>
+            <a:pPr lvl="1" algn="just"/>
+            <a:r>
+              <a:rPr lang="en-IN" dirty="0">
                 <a:latin typeface="Times New Roman" panose="02020603050405020304" pitchFamily="18" charset="0"/>
                 <a:cs typeface="Times New Roman" panose="02020603050405020304" pitchFamily="18" charset="0"/>
               </a:rPr>
-              <a:t>To use it to create tables and organize data in database.</a:t>
-            </a:r>
+              <a:t>Cross-Platform</a:t>
+            </a:r>
+            <a:endParaRPr lang="en-US" dirty="0">
+              <a:latin typeface="Times New Roman" panose="02020603050405020304" pitchFamily="18" charset="0"/>
+              <a:cs typeface="Times New Roman" panose="02020603050405020304" pitchFamily="18" charset="0"/>
+            </a:endParaRPr>
+          </a:p>
+          <a:p>
+            <a:pPr algn="just"/>
             <a:endParaRPr lang="en-IN" dirty="0">
               <a:latin typeface="Times New Roman" panose="02020603050405020304" pitchFamily="18" charset="0"/>
               <a:cs typeface="Times New Roman" panose="02020603050405020304" pitchFamily="18" charset="0"/>
@@ -8460,7 +8750,7 @@
     </p:spTree>
     <p:extLst>
       <p:ext uri="{BB962C8B-B14F-4D97-AF65-F5344CB8AC3E}">
-        <p14:creationId xmlns:p14="http://schemas.microsoft.com/office/powerpoint/2010/main" val="1057269578"/>
+        <p14:creationId xmlns:p14="http://schemas.microsoft.com/office/powerpoint/2010/main" val="583469750"/>
       </p:ext>
     </p:extLst>
   </p:cSld>
@@ -8492,6 +8782,137 @@
           <p:cNvPr id="2" name="Title 1">
             <a:extLst>
               <a:ext uri="{FF2B5EF4-FFF2-40B4-BE49-F238E27FC236}">
+                <a16:creationId xmlns:a16="http://schemas.microsoft.com/office/drawing/2014/main" id="{6058498E-0530-C03C-DC64-394C6F565700}"/>
+              </a:ext>
+            </a:extLst>
+          </p:cNvPr>
+          <p:cNvSpPr>
+            <a:spLocks noGrp="1"/>
+          </p:cNvSpPr>
+          <p:nvPr>
+            <p:ph type="title"/>
+          </p:nvPr>
+        </p:nvSpPr>
+        <p:spPr/>
+        <p:txBody>
+          <a:bodyPr>
+            <a:normAutofit/>
+          </a:bodyPr>
+          <a:lstStyle/>
+          <a:p>
+            <a:r>
+              <a:rPr lang="en-US" sz="3600" b="1" dirty="0">
+                <a:latin typeface="Times New Roman" panose="02020603050405020304" pitchFamily="18" charset="0"/>
+                <a:cs typeface="Times New Roman" panose="02020603050405020304" pitchFamily="18" charset="0"/>
+              </a:rPr>
+              <a:t>Why MySQL is important</a:t>
+            </a:r>
+            <a:endParaRPr lang="en-IN" sz="3600" b="1" dirty="0">
+              <a:latin typeface="Times New Roman" panose="02020603050405020304" pitchFamily="18" charset="0"/>
+              <a:cs typeface="Times New Roman" panose="02020603050405020304" pitchFamily="18" charset="0"/>
+            </a:endParaRPr>
+          </a:p>
+        </p:txBody>
+      </p:sp>
+      <p:sp>
+        <p:nvSpPr>
+          <p:cNvPr id="3" name="Content Placeholder 2">
+            <a:extLst>
+              <a:ext uri="{FF2B5EF4-FFF2-40B4-BE49-F238E27FC236}">
+                <a16:creationId xmlns:a16="http://schemas.microsoft.com/office/drawing/2014/main" id="{5B8997E7-894F-9B9B-9AFB-F7F86E54A092}"/>
+              </a:ext>
+            </a:extLst>
+          </p:cNvPr>
+          <p:cNvSpPr>
+            <a:spLocks noGrp="1"/>
+          </p:cNvSpPr>
+          <p:nvPr>
+            <p:ph idx="1"/>
+          </p:nvPr>
+        </p:nvSpPr>
+        <p:spPr/>
+        <p:txBody>
+          <a:bodyPr/>
+          <a:lstStyle/>
+          <a:p>
+            <a:r>
+              <a:rPr lang="en-US" dirty="0">
+                <a:latin typeface="Times New Roman" panose="02020603050405020304" pitchFamily="18" charset="0"/>
+                <a:cs typeface="Times New Roman" panose="02020603050405020304" pitchFamily="18" charset="0"/>
+              </a:rPr>
+              <a:t>It is used by web developers in websites for backend data storage and data processing solutions.</a:t>
+            </a:r>
+          </a:p>
+          <a:p>
+            <a:r>
+              <a:rPr lang="en-US" dirty="0">
+                <a:latin typeface="Times New Roman" panose="02020603050405020304" pitchFamily="18" charset="0"/>
+                <a:cs typeface="Times New Roman" panose="02020603050405020304" pitchFamily="18" charset="0"/>
+              </a:rPr>
+              <a:t>It is important to know about SQL for 2 reasons:</a:t>
+            </a:r>
+          </a:p>
+          <a:p>
+            <a:pPr lvl="1"/>
+            <a:r>
+              <a:rPr lang="en-US" dirty="0">
+                <a:latin typeface="Times New Roman" panose="02020603050405020304" pitchFamily="18" charset="0"/>
+                <a:cs typeface="Times New Roman" panose="02020603050405020304" pitchFamily="18" charset="0"/>
+              </a:rPr>
+              <a:t>To get information from database.</a:t>
+            </a:r>
+          </a:p>
+          <a:p>
+            <a:pPr lvl="1"/>
+            <a:r>
+              <a:rPr lang="en-US" dirty="0">
+                <a:latin typeface="Times New Roman" panose="02020603050405020304" pitchFamily="18" charset="0"/>
+                <a:cs typeface="Times New Roman" panose="02020603050405020304" pitchFamily="18" charset="0"/>
+              </a:rPr>
+              <a:t>To use it to create tables and organize data in database.</a:t>
+            </a:r>
+            <a:endParaRPr lang="en-IN" dirty="0">
+              <a:latin typeface="Times New Roman" panose="02020603050405020304" pitchFamily="18" charset="0"/>
+              <a:cs typeface="Times New Roman" panose="02020603050405020304" pitchFamily="18" charset="0"/>
+            </a:endParaRPr>
+          </a:p>
+        </p:txBody>
+      </p:sp>
+    </p:spTree>
+    <p:extLst>
+      <p:ext uri="{BB962C8B-B14F-4D97-AF65-F5344CB8AC3E}">
+        <p14:creationId xmlns:p14="http://schemas.microsoft.com/office/powerpoint/2010/main" val="1057269578"/>
+      </p:ext>
+    </p:extLst>
+  </p:cSld>
+  <p:clrMapOvr>
+    <a:masterClrMapping/>
+  </p:clrMapOvr>
+</p:sld>
+</file>
+
+<file path=ppt/slides/slide7.xml><?xml version="1.0" encoding="utf-8"?>
+<p:sld xmlns:a="http://schemas.openxmlformats.org/drawingml/2006/main" xmlns:r="http://schemas.openxmlformats.org/officeDocument/2006/relationships" xmlns:p="http://schemas.openxmlformats.org/presentationml/2006/main">
+  <p:cSld>
+    <p:spTree>
+      <p:nvGrpSpPr>
+        <p:cNvPr id="1" name=""/>
+        <p:cNvGrpSpPr/>
+        <p:nvPr/>
+      </p:nvGrpSpPr>
+      <p:grpSpPr>
+        <a:xfrm>
+          <a:off x="0" y="0"/>
+          <a:ext cx="0" cy="0"/>
+          <a:chOff x="0" y="0"/>
+          <a:chExt cx="0" cy="0"/>
+        </a:xfrm>
+      </p:grpSpPr>
+      <p:sp>
+        <p:nvSpPr>
+          <p:cNvPr id="2" name="Title 1">
+            <a:extLst>
+              <a:ext uri="{FF2B5EF4-FFF2-40B4-BE49-F238E27FC236}">
                 <a16:creationId xmlns:a16="http://schemas.microsoft.com/office/drawing/2014/main" id="{B0152CDE-1DA6-8B37-9F16-974097AF34C8}"/>
               </a:ext>
             </a:extLst>
@@ -8575,7 +8996,7 @@
 </p:sld>
 </file>
 
-<file path=ppt/slides/slide7.xml><?xml version="1.0" encoding="utf-8"?>
+<file path=ppt/slides/slide8.xml><?xml version="1.0" encoding="utf-8"?>
 <p:sld xmlns:a="http://schemas.openxmlformats.org/drawingml/2006/main" xmlns:r="http://schemas.openxmlformats.org/officeDocument/2006/relationships" xmlns:p="http://schemas.openxmlformats.org/presentationml/2006/main">
   <p:cSld>
     <p:spTree>
@@ -8676,7 +9097,7 @@
 </p:sld>
 </file>
 
-<file path=ppt/slides/slide8.xml><?xml version="1.0" encoding="utf-8"?>
+<file path=ppt/slides/slide9.xml><?xml version="1.0" encoding="utf-8"?>
 <p:sld xmlns:a="http://schemas.openxmlformats.org/drawingml/2006/main" xmlns:r="http://schemas.openxmlformats.org/officeDocument/2006/relationships" xmlns:p="http://schemas.openxmlformats.org/presentationml/2006/main">
   <p:cSld>
     <p:spTree>
@@ -8892,267 +9313,6 @@
     <p:extLst>
       <p:ext uri="{BB962C8B-B14F-4D97-AF65-F5344CB8AC3E}">
         <p14:creationId xmlns:p14="http://schemas.microsoft.com/office/powerpoint/2010/main" val="1214576996"/>
-      </p:ext>
-    </p:extLst>
-  </p:cSld>
-  <p:clrMapOvr>
-    <a:masterClrMapping/>
-  </p:clrMapOvr>
-</p:sld>
-</file>
-
-<file path=ppt/slides/slide9.xml><?xml version="1.0" encoding="utf-8"?>
-<p:sld xmlns:a="http://schemas.openxmlformats.org/drawingml/2006/main" xmlns:r="http://schemas.openxmlformats.org/officeDocument/2006/relationships" xmlns:p="http://schemas.openxmlformats.org/presentationml/2006/main">
-  <p:cSld>
-    <p:spTree>
-      <p:nvGrpSpPr>
-        <p:cNvPr id="1" name="">
-          <a:extLst>
-            <a:ext uri="{FF2B5EF4-FFF2-40B4-BE49-F238E27FC236}">
-              <a16:creationId xmlns:a16="http://schemas.microsoft.com/office/drawing/2014/main" id="{FE268DC2-AA4B-64A5-FD26-DF8FD118F92C}"/>
-            </a:ext>
-          </a:extLst>
-        </p:cNvPr>
-        <p:cNvGrpSpPr/>
-        <p:nvPr/>
-      </p:nvGrpSpPr>
-      <p:grpSpPr>
-        <a:xfrm>
-          <a:off x="0" y="0"/>
-          <a:ext cx="0" cy="0"/>
-          <a:chOff x="0" y="0"/>
-          <a:chExt cx="0" cy="0"/>
-        </a:xfrm>
-      </p:grpSpPr>
-      <p:sp>
-        <p:nvSpPr>
-          <p:cNvPr id="2" name="Title 1">
-            <a:extLst>
-              <a:ext uri="{FF2B5EF4-FFF2-40B4-BE49-F238E27FC236}">
-                <a16:creationId xmlns:a16="http://schemas.microsoft.com/office/drawing/2014/main" id="{F3EB253C-B181-2E24-743C-51B53E4FFA0B}"/>
-              </a:ext>
-            </a:extLst>
-          </p:cNvPr>
-          <p:cNvSpPr>
-            <a:spLocks noGrp="1"/>
-          </p:cNvSpPr>
-          <p:nvPr>
-            <p:ph type="title"/>
-          </p:nvPr>
-        </p:nvSpPr>
-        <p:spPr/>
-        <p:txBody>
-          <a:bodyPr>
-            <a:normAutofit/>
-          </a:bodyPr>
-          <a:lstStyle/>
-          <a:p>
-            <a:r>
-              <a:rPr lang="en-US" sz="2400" dirty="0"/>
-              <a:t>2. Write a query to display customers who booked rooms between room IDs 1 and 5 using Customers and Bookings tables.</a:t>
-            </a:r>
-            <a:endParaRPr lang="en-IN" sz="2400" dirty="0"/>
-          </a:p>
-        </p:txBody>
-      </p:sp>
-      <p:sp>
-        <p:nvSpPr>
-          <p:cNvPr id="3" name="Content Placeholder 2">
-            <a:extLst>
-              <a:ext uri="{FF2B5EF4-FFF2-40B4-BE49-F238E27FC236}">
-                <a16:creationId xmlns:a16="http://schemas.microsoft.com/office/drawing/2014/main" id="{10D03B1B-66E3-9B66-AAFA-58C341FF73E9}"/>
-              </a:ext>
-            </a:extLst>
-          </p:cNvPr>
-          <p:cNvSpPr>
-            <a:spLocks noGrp="1"/>
-          </p:cNvSpPr>
-          <p:nvPr>
-            <p:ph idx="1"/>
-          </p:nvPr>
-        </p:nvSpPr>
-        <p:spPr/>
-        <p:txBody>
-          <a:bodyPr numCol="2"/>
-          <a:lstStyle/>
-          <a:p>
-            <a:pPr marL="0" indent="0">
-              <a:buNone/>
-            </a:pPr>
-            <a:r>
-              <a:rPr lang="en-IN" b="1" dirty="0"/>
-              <a:t>Query:</a:t>
-            </a:r>
-          </a:p>
-          <a:p>
-            <a:pPr marL="457200" lvl="1" indent="0">
-              <a:buNone/>
-            </a:pPr>
-            <a:endParaRPr lang="en-IN" dirty="0"/>
-          </a:p>
-          <a:p>
-            <a:pPr marL="457200" lvl="1" indent="0">
-              <a:buNone/>
-            </a:pPr>
-            <a:r>
-              <a:rPr lang="en-US" dirty="0"/>
-              <a:t>SELECT </a:t>
-            </a:r>
-            <a:r>
-              <a:rPr lang="en-US" dirty="0" err="1"/>
-              <a:t>c.first_name</a:t>
-            </a:r>
-            <a:r>
-              <a:rPr lang="en-US" dirty="0"/>
-              <a:t>,</a:t>
-            </a:r>
-          </a:p>
-          <a:p>
-            <a:pPr marL="457200" lvl="1" indent="0">
-              <a:buNone/>
-            </a:pPr>
-            <a:r>
-              <a:rPr lang="en-US" dirty="0"/>
-              <a:t>       </a:t>
-            </a:r>
-            <a:r>
-              <a:rPr lang="en-US" dirty="0" err="1"/>
-              <a:t>c.last_name</a:t>
-            </a:r>
-            <a:r>
-              <a:rPr lang="en-US" dirty="0"/>
-              <a:t>,</a:t>
-            </a:r>
-          </a:p>
-          <a:p>
-            <a:pPr marL="457200" lvl="1" indent="0">
-              <a:buNone/>
-            </a:pPr>
-            <a:r>
-              <a:rPr lang="en-US" dirty="0"/>
-              <a:t>       </a:t>
-            </a:r>
-            <a:r>
-              <a:rPr lang="en-US" dirty="0" err="1"/>
-              <a:t>b.room_id</a:t>
-            </a:r>
-            <a:endParaRPr lang="en-US" dirty="0"/>
-          </a:p>
-          <a:p>
-            <a:pPr marL="457200" lvl="1" indent="0">
-              <a:buNone/>
-            </a:pPr>
-            <a:r>
-              <a:rPr lang="en-US" dirty="0"/>
-              <a:t>FROM Customers c</a:t>
-            </a:r>
-          </a:p>
-          <a:p>
-            <a:pPr marL="457200" lvl="1" indent="0">
-              <a:buNone/>
-            </a:pPr>
-            <a:r>
-              <a:rPr lang="en-US" dirty="0"/>
-              <a:t>INNER JOIN Bookings b</a:t>
-            </a:r>
-          </a:p>
-          <a:p>
-            <a:pPr marL="457200" lvl="1" indent="0">
-              <a:buNone/>
-            </a:pPr>
-            <a:r>
-              <a:rPr lang="en-US" dirty="0"/>
-              <a:t>ON </a:t>
-            </a:r>
-            <a:r>
-              <a:rPr lang="en-US" dirty="0" err="1"/>
-              <a:t>c.customer_id</a:t>
-            </a:r>
-            <a:r>
-              <a:rPr lang="en-US" dirty="0"/>
-              <a:t> = </a:t>
-            </a:r>
-            <a:r>
-              <a:rPr lang="en-US" dirty="0" err="1"/>
-              <a:t>b.customer_id</a:t>
-            </a:r>
-            <a:endParaRPr lang="en-US" dirty="0"/>
-          </a:p>
-          <a:p>
-            <a:pPr marL="457200" lvl="1" indent="0">
-              <a:buNone/>
-            </a:pPr>
-            <a:r>
-              <a:rPr lang="en-US" dirty="0"/>
-              <a:t>WHERE </a:t>
-            </a:r>
-            <a:r>
-              <a:rPr lang="en-US" dirty="0" err="1"/>
-              <a:t>b.room_id</a:t>
-            </a:r>
-            <a:r>
-              <a:rPr lang="en-US" dirty="0"/>
-              <a:t> BETWEEN 1 AND 5;</a:t>
-            </a:r>
-          </a:p>
-          <a:p>
-            <a:pPr marL="457200" lvl="1" indent="0">
-              <a:buNone/>
-            </a:pPr>
-            <a:endParaRPr lang="en-US" dirty="0"/>
-          </a:p>
-          <a:p>
-            <a:pPr marL="457200" lvl="1" indent="0">
-              <a:buNone/>
-            </a:pPr>
-            <a:r>
-              <a:rPr lang="en-US" sz="2800" b="1" dirty="0"/>
-              <a:t>Output:</a:t>
-            </a:r>
-            <a:endParaRPr lang="en-IN" b="1" dirty="0"/>
-          </a:p>
-        </p:txBody>
-      </p:sp>
-      <p:pic>
-        <p:nvPicPr>
-          <p:cNvPr id="5" name="Picture 4">
-            <a:extLst>
-              <a:ext uri="{FF2B5EF4-FFF2-40B4-BE49-F238E27FC236}">
-                <a16:creationId xmlns:a16="http://schemas.microsoft.com/office/drawing/2014/main" id="{02822D50-9E41-2F4F-B0BE-10829D10439C}"/>
-              </a:ext>
-            </a:extLst>
-          </p:cNvPr>
-          <p:cNvPicPr>
-            <a:picLocks noChangeAspect="1"/>
-          </p:cNvPicPr>
-          <p:nvPr/>
-        </p:nvPicPr>
-        <p:blipFill>
-          <a:blip r:embed="rId2">
-            <a:extLst>
-              <a:ext uri="{28A0092B-C50C-407E-A947-70E740481C1C}">
-                <a14:useLocalDpi xmlns:a14="http://schemas.microsoft.com/office/drawing/2010/main" val="0"/>
-              </a:ext>
-            </a:extLst>
-          </a:blip>
-          <a:stretch>
-            <a:fillRect/>
-          </a:stretch>
-        </p:blipFill>
-        <p:spPr>
-          <a:xfrm>
-            <a:off x="7549378" y="2598085"/>
-            <a:ext cx="2676170" cy="3578878"/>
-          </a:xfrm>
-          <a:prstGeom prst="rect">
-            <a:avLst/>
-          </a:prstGeom>
-        </p:spPr>
-      </p:pic>
-    </p:spTree>
-    <p:extLst>
-      <p:ext uri="{BB962C8B-B14F-4D97-AF65-F5344CB8AC3E}">
-        <p14:creationId xmlns:p14="http://schemas.microsoft.com/office/powerpoint/2010/main" val="428483957"/>
       </p:ext>
     </p:extLst>
   </p:cSld>
